--- a/Comercial/Modelos/BASE.pptx
+++ b/Comercial/Modelos/BASE.pptx
@@ -297,7 +297,7 @@
                 <a:ea typeface="+mn-ea"/>
                 <a:cs typeface="Leelawadee" panose="020B0502040204020203" pitchFamily="34" charset="-34"/>
               </a:rPr>
-              <a:t>2025</a:t>
+              <a:t>2026</a:t>
             </a:r>
           </a:p>
         </p:txBody>
@@ -353,18 +353,18 @@
         </p:nvSpPr>
         <p:spPr>
           <a:xfrm>
-            <a:off x="5181600" y="13781"/>
-            <a:ext cx="8229600" cy="938719"/>
+            <a:off x="0" y="13781"/>
+            <a:ext cx="18288000" cy="938719"/>
           </a:xfrm>
           <a:prstGeom prst="rect">
             <a:avLst/>
           </a:prstGeom>
         </p:spPr>
         <p:txBody>
-          <a:bodyPr/>
+          <a:bodyPr anchor="ctr"/>
           <a:lstStyle>
             <a:lvl1pPr>
-              <a:defRPr baseline="0">
+              <a:defRPr sz="3000" baseline="0">
                 <a:solidFill>
                   <a:schemeClr val="bg1"/>
                 </a:solidFill>
